--- a/schools-presentations/A Lykeiou/alloglossoi/A.5.M1 Introduction - Part 1 English.pptx
+++ b/schools-presentations/A Lykeiou/alloglossoi/A.5.M1 Introduction - Part 1 English.pptx
@@ -127,7 +127,7 @@
 <file path=ppt/revisionInfo.xml><?xml version="1.0" encoding="utf-8"?>
 <p1510:revInfo xmlns:a="http://schemas.openxmlformats.org/drawingml/2006/main" xmlns:r="http://schemas.openxmlformats.org/officeDocument/2006/relationships" xmlns:p1510="http://schemas.microsoft.com/office/powerpoint/2015/10/main">
   <p1510:revLst>
-    <p1510:client id="{7208766C-F189-46AD-AA14-E432BF4FDC6C}" v="248" dt="2026-10-06T18:51:18.753"/>
+    <p1510:client id="{7208766C-F189-46AD-AA14-E432BF4FDC6C}" v="2" dt="2026-10-08T05:46:01.163"/>
   </p1510:revLst>
 </p1510:revInfo>
 </file>
@@ -136,19 +136,35 @@
 <pc:chgInfo xmlns:a="http://schemas.openxmlformats.org/drawingml/2006/main" xmlns:r="http://schemas.openxmlformats.org/officeDocument/2006/relationships" xmlns:ac="http://schemas.microsoft.com/office/drawing/2013/main/command" xmlns:pc="http://schemas.microsoft.com/office/powerpoint/2013/main/command">
   <pc:docChgLst>
     <pc:chgData name="Άριστος Αρέστη" userId="813aa191-2d4c-464f-9d05-0a7e494d859f" providerId="ADAL" clId="{49C7B61D-1ACF-4AFF-A04E-A3B433E32474}"/>
-    <pc:docChg chg="custSel addSld modSld">
-      <pc:chgData name="Άριστος Αρέστη" userId="813aa191-2d4c-464f-9d05-0a7e494d859f" providerId="ADAL" clId="{49C7B61D-1ACF-4AFF-A04E-A3B433E32474}" dt="2026-10-06T18:51:49.006" v="352" actId="20577"/>
+    <pc:docChg chg="undo custSel addSld modSld">
+      <pc:chgData name="Άριστος Αρέστη" userId="813aa191-2d4c-464f-9d05-0a7e494d859f" providerId="ADAL" clId="{49C7B61D-1ACF-4AFF-A04E-A3B433E32474}" dt="2026-10-08T05:46:24.719" v="376" actId="1076"/>
       <pc:docMkLst>
         <pc:docMk/>
       </pc:docMkLst>
       <pc:sldChg chg="addSp delSp modSp mod">
-        <pc:chgData name="Άριστος Αρέστη" userId="813aa191-2d4c-464f-9d05-0a7e494d859f" providerId="ADAL" clId="{49C7B61D-1ACF-4AFF-A04E-A3B433E32474}" dt="2026-10-06T18:47:55.788" v="10" actId="14100"/>
+        <pc:chgData name="Άριστος Αρέστη" userId="813aa191-2d4c-464f-9d05-0a7e494d859f" providerId="ADAL" clId="{49C7B61D-1ACF-4AFF-A04E-A3B433E32474}" dt="2026-10-08T05:46:24.719" v="376" actId="1076"/>
         <pc:sldMkLst>
           <pc:docMk/>
           <pc:sldMk cId="1459875993" sldId="261"/>
         </pc:sldMkLst>
         <pc:spChg chg="mod">
-          <ac:chgData name="Άριστος Αρέστη" userId="813aa191-2d4c-464f-9d05-0a7e494d859f" providerId="ADAL" clId="{49C7B61D-1ACF-4AFF-A04E-A3B433E32474}" dt="2026-10-06T18:47:47.964" v="8" actId="14100"/>
+          <ac:chgData name="Άριστος Αρέστη" userId="813aa191-2d4c-464f-9d05-0a7e494d859f" providerId="ADAL" clId="{49C7B61D-1ACF-4AFF-A04E-A3B433E32474}" dt="2026-10-08T05:46:24.719" v="376" actId="1076"/>
+          <ac:spMkLst>
+            <pc:docMk/>
+            <pc:sldMk cId="1459875993" sldId="261"/>
+            <ac:spMk id="39" creationId="{4CF7BC71-3174-4D73-8BC9-07D3A64CED1D}"/>
+          </ac:spMkLst>
+        </pc:spChg>
+        <pc:spChg chg="mod">
+          <ac:chgData name="Άριστος Αρέστη" userId="813aa191-2d4c-464f-9d05-0a7e494d859f" providerId="ADAL" clId="{49C7B61D-1ACF-4AFF-A04E-A3B433E32474}" dt="2026-10-08T05:45:15.411" v="359" actId="20577"/>
+          <ac:spMkLst>
+            <pc:docMk/>
+            <pc:sldMk cId="1459875993" sldId="261"/>
+            <ac:spMk id="41" creationId="{72025841-5F3E-4A8B-BBCB-C2D4BF0A45C6}"/>
+          </ac:spMkLst>
+        </pc:spChg>
+        <pc:spChg chg="mod">
+          <ac:chgData name="Άριστος Αρέστη" userId="813aa191-2d4c-464f-9d05-0a7e494d859f" providerId="ADAL" clId="{49C7B61D-1ACF-4AFF-A04E-A3B433E32474}" dt="2026-10-08T05:46:01.163" v="373"/>
           <ac:spMkLst>
             <pc:docMk/>
             <pc:sldMk cId="1459875993" sldId="261"/>
@@ -156,7 +172,15 @@
           </ac:spMkLst>
         </pc:spChg>
         <pc:spChg chg="mod">
-          <ac:chgData name="Άριστος Αρέστη" userId="813aa191-2d4c-464f-9d05-0a7e494d859f" providerId="ADAL" clId="{49C7B61D-1ACF-4AFF-A04E-A3B433E32474}" dt="2026-10-06T18:47:51.681" v="9" actId="14100"/>
+          <ac:chgData name="Άριστος Αρέστη" userId="813aa191-2d4c-464f-9d05-0a7e494d859f" providerId="ADAL" clId="{49C7B61D-1ACF-4AFF-A04E-A3B433E32474}" dt="2026-10-08T05:45:19.388" v="365" actId="20577"/>
+          <ac:spMkLst>
+            <pc:docMk/>
+            <pc:sldMk cId="1459875993" sldId="261"/>
+            <ac:spMk id="43" creationId="{3442AF39-5E21-47CA-9B8C-2D1B30A96F15}"/>
+          </ac:spMkLst>
+        </pc:spChg>
+        <pc:spChg chg="mod">
+          <ac:chgData name="Άριστος Αρέστη" userId="813aa191-2d4c-464f-9d05-0a7e494d859f" providerId="ADAL" clId="{49C7B61D-1ACF-4AFF-A04E-A3B433E32474}" dt="2026-10-08T05:45:55.711" v="372" actId="21"/>
           <ac:spMkLst>
             <pc:docMk/>
             <pc:sldMk cId="1459875993" sldId="261"/>
@@ -164,7 +188,7 @@
           </ac:spMkLst>
         </pc:spChg>
         <pc:spChg chg="mod">
-          <ac:chgData name="Άριστος Αρέστη" userId="813aa191-2d4c-464f-9d05-0a7e494d859f" providerId="ADAL" clId="{49C7B61D-1ACF-4AFF-A04E-A3B433E32474}" dt="2026-10-06T18:47:55.788" v="10" actId="14100"/>
+          <ac:chgData name="Άριστος Αρέστη" userId="813aa191-2d4c-464f-9d05-0a7e494d859f" providerId="ADAL" clId="{49C7B61D-1ACF-4AFF-A04E-A3B433E32474}" dt="2026-10-08T05:45:30.886" v="368" actId="14100"/>
           <ac:spMkLst>
             <pc:docMk/>
             <pc:sldMk cId="1459875993" sldId="261"/>
@@ -179,22 +203,6 @@
             <ac:picMk id="5" creationId="{FD2A978B-839D-CE28-DD39-A0E1A6F3D313}"/>
           </ac:picMkLst>
         </pc:picChg>
-        <pc:picChg chg="del">
-          <ac:chgData name="Άριστος Αρέστη" userId="813aa191-2d4c-464f-9d05-0a7e494d859f" providerId="ADAL" clId="{49C7B61D-1ACF-4AFF-A04E-A3B433E32474}" dt="2026-10-06T18:47:39.955" v="5" actId="478"/>
-          <ac:picMkLst>
-            <pc:docMk/>
-            <pc:sldMk cId="1459875993" sldId="261"/>
-            <ac:picMk id="78" creationId="{00000000-0000-0000-0000-000000000000}"/>
-          </ac:picMkLst>
-        </pc:picChg>
-        <pc:picChg chg="del">
-          <ac:chgData name="Άριστος Αρέστη" userId="813aa191-2d4c-464f-9d05-0a7e494d859f" providerId="ADAL" clId="{49C7B61D-1ACF-4AFF-A04E-A3B433E32474}" dt="2026-10-06T18:47:42.119" v="6" actId="478"/>
-          <ac:picMkLst>
-            <pc:docMk/>
-            <pc:sldMk cId="1459875993" sldId="261"/>
-            <ac:picMk id="79" creationId="{00000000-0000-0000-0000-000000000000}"/>
-          </ac:picMkLst>
-        </pc:picChg>
       </pc:sldChg>
       <pc:sldChg chg="addSp delSp modSp mod">
         <pc:chgData name="Άριστος Αρέστη" userId="813aa191-2d4c-464f-9d05-0a7e494d859f" providerId="ADAL" clId="{49C7B61D-1ACF-4AFF-A04E-A3B433E32474}" dt="2026-10-06T18:48:50.582" v="14" actId="14100"/>
@@ -202,22 +210,6 @@
           <pc:docMk/>
           <pc:sldMk cId="3786659628" sldId="262"/>
         </pc:sldMkLst>
-        <pc:spChg chg="del mod">
-          <ac:chgData name="Άριστος Αρέστη" userId="813aa191-2d4c-464f-9d05-0a7e494d859f" providerId="ADAL" clId="{49C7B61D-1ACF-4AFF-A04E-A3B433E32474}" dt="2026-10-06T18:46:30.252" v="4" actId="478"/>
-          <ac:spMkLst>
-            <pc:docMk/>
-            <pc:sldMk cId="3786659628" sldId="262"/>
-            <ac:spMk id="4" creationId="{EB3F7303-CEA4-CFC4-5052-5C4AC627408E}"/>
-          </ac:spMkLst>
-        </pc:spChg>
-        <pc:spChg chg="del mod">
-          <ac:chgData name="Άριστος Αρέστη" userId="813aa191-2d4c-464f-9d05-0a7e494d859f" providerId="ADAL" clId="{49C7B61D-1ACF-4AFF-A04E-A3B433E32474}" dt="2026-10-06T18:46:23.068" v="2" actId="478"/>
-          <ac:spMkLst>
-            <pc:docMk/>
-            <pc:sldMk cId="3786659628" sldId="262"/>
-            <ac:spMk id="5" creationId="{C7FC9694-22EE-4D57-B311-74524FD09F4E}"/>
-          </ac:spMkLst>
-        </pc:spChg>
         <pc:spChg chg="mod">
           <ac:chgData name="Άριστος Αρέστη" userId="813aa191-2d4c-464f-9d05-0a7e494d859f" providerId="ADAL" clId="{49C7B61D-1ACF-4AFF-A04E-A3B433E32474}" dt="2026-10-06T18:48:46.516" v="13" actId="14100"/>
           <ac:spMkLst>
@@ -2090,7 +2082,7 @@
           <a:lstStyle/>
           <a:p>
             <a:fld id="{0E1AB97B-D0C7-4CCB-8568-F47C13D538D5}" type="datetimeFigureOut">
-              <a:t>06-Oct-26</a:t>
+              <a:t>08-Oct-26</a:t>
             </a:fld>
             <a:endParaRPr/>
           </a:p>
@@ -2364,7 +2356,7 @@
           <a:lstStyle/>
           <a:p>
             <a:fld id="{0E1AB97B-D0C7-4CCB-8568-F47C13D538D5}" type="datetimeFigureOut">
-              <a:t>06-Oct-26</a:t>
+              <a:t>08-Oct-26</a:t>
             </a:fld>
             <a:endParaRPr/>
           </a:p>
@@ -2708,7 +2700,7 @@
           <a:lstStyle/>
           <a:p>
             <a:fld id="{0E1AB97B-D0C7-4CCB-8568-F47C13D538D5}" type="datetimeFigureOut">
-              <a:t>06-Oct-26</a:t>
+              <a:t>08-Oct-26</a:t>
             </a:fld>
             <a:endParaRPr/>
           </a:p>
@@ -3086,7 +3078,7 @@
           <a:lstStyle/>
           <a:p>
             <a:fld id="{0E1AB97B-D0C7-4CCB-8568-F47C13D538D5}" type="datetimeFigureOut">
-              <a:t>06-Oct-26</a:t>
+              <a:t>08-Oct-26</a:t>
             </a:fld>
             <a:endParaRPr/>
           </a:p>
@@ -3430,7 +3422,7 @@
           <a:lstStyle/>
           <a:p>
             <a:fld id="{0E1AB97B-D0C7-4CCB-8568-F47C13D538D5}" type="datetimeFigureOut">
-              <a:t>06-Oct-26</a:t>
+              <a:t>08-Oct-26</a:t>
             </a:fld>
             <a:endParaRPr/>
           </a:p>
@@ -3875,7 +3867,7 @@
           <a:lstStyle/>
           <a:p>
             <a:fld id="{0E1AB97B-D0C7-4CCB-8568-F47C13D538D5}" type="datetimeFigureOut">
-              <a:t>06-Oct-26</a:t>
+              <a:t>08-Oct-26</a:t>
             </a:fld>
             <a:endParaRPr/>
           </a:p>
@@ -4070,7 +4062,7 @@
           <a:lstStyle/>
           <a:p>
             <a:fld id="{0E1AB97B-D0C7-4CCB-8568-F47C13D538D5}" type="datetimeFigureOut">
-              <a:t>06-Oct-26</a:t>
+              <a:t>08-Oct-26</a:t>
             </a:fld>
             <a:endParaRPr/>
           </a:p>
@@ -4275,7 +4267,7 @@
           <a:lstStyle/>
           <a:p>
             <a:fld id="{0E1AB97B-D0C7-4CCB-8568-F47C13D538D5}" type="datetimeFigureOut">
-              <a:t>06-Oct-26</a:t>
+              <a:t>08-Oct-26</a:t>
             </a:fld>
             <a:endParaRPr/>
           </a:p>
@@ -4470,7 +4462,7 @@
           <a:lstStyle/>
           <a:p>
             <a:fld id="{0E1AB97B-D0C7-4CCB-8568-F47C13D538D5}" type="datetimeFigureOut">
-              <a:t>06-Oct-26</a:t>
+              <a:t>08-Oct-26</a:t>
             </a:fld>
             <a:endParaRPr/>
           </a:p>
@@ -4740,7 +4732,7 @@
           <a:lstStyle/>
           <a:p>
             <a:fld id="{0E1AB97B-D0C7-4CCB-8568-F47C13D538D5}" type="datetimeFigureOut">
-              <a:t>06-Oct-26</a:t>
+              <a:t>08-Oct-26</a:t>
             </a:fld>
             <a:endParaRPr/>
           </a:p>
@@ -5007,7 +4999,7 @@
           <a:lstStyle/>
           <a:p>
             <a:fld id="{0E1AB97B-D0C7-4CCB-8568-F47C13D538D5}" type="datetimeFigureOut">
-              <a:t>06-Oct-26</a:t>
+              <a:t>08-Oct-26</a:t>
             </a:fld>
             <a:endParaRPr/>
           </a:p>
@@ -5431,7 +5423,7 @@
           <a:lstStyle/>
           <a:p>
             <a:fld id="{0E1AB97B-D0C7-4CCB-8568-F47C13D538D5}" type="datetimeFigureOut">
-              <a:t>06-Oct-26</a:t>
+              <a:t>08-Oct-26</a:t>
             </a:fld>
             <a:endParaRPr/>
           </a:p>
@@ -5569,7 +5561,7 @@
           <a:lstStyle/>
           <a:p>
             <a:fld id="{0E1AB97B-D0C7-4CCB-8568-F47C13D538D5}" type="datetimeFigureOut">
-              <a:t>06-Oct-26</a:t>
+              <a:t>08-Oct-26</a:t>
             </a:fld>
             <a:endParaRPr/>
           </a:p>
@@ -5675,7 +5667,7 @@
           <a:lstStyle/>
           <a:p>
             <a:fld id="{0E1AB97B-D0C7-4CCB-8568-F47C13D538D5}" type="datetimeFigureOut">
-              <a:t>06-Oct-26</a:t>
+              <a:t>08-Oct-26</a:t>
             </a:fld>
             <a:endParaRPr/>
           </a:p>
@@ -5963,7 +5955,7 @@
           <a:lstStyle/>
           <a:p>
             <a:fld id="{0E1AB97B-D0C7-4CCB-8568-F47C13D538D5}" type="datetimeFigureOut">
-              <a:t>06-Oct-26</a:t>
+              <a:t>08-Oct-26</a:t>
             </a:fld>
             <a:endParaRPr/>
           </a:p>
@@ -6306,7 +6298,7 @@
           <a:lstStyle/>
           <a:p>
             <a:fld id="{0E1AB97B-D0C7-4CCB-8568-F47C13D538D5}" type="datetimeFigureOut">
-              <a:t>06-Oct-26</a:t>
+              <a:t>08-Oct-26</a:t>
             </a:fld>
             <a:endParaRPr/>
           </a:p>
@@ -7150,7 +7142,7 @@
           </a:lstStyle>
           <a:p>
             <a:fld id="{0E1AB97B-D0C7-4CCB-8568-F47C13D538D5}" type="datetimeFigureOut">
-              <a:t>06-Oct-26</a:t>
+              <a:t>08-Oct-26</a:t>
             </a:fld>
             <a:endParaRPr/>
           </a:p>
@@ -13134,8 +13126,8 @@
         </p:nvSpPr>
         <p:spPr>
           <a:xfrm>
-            <a:off x="590550" y="1352550"/>
-            <a:ext cx="11049000" cy="5000625"/>
+            <a:off x="367554" y="1353312"/>
+            <a:ext cx="11049000" cy="4685538"/>
           </a:xfrm>
           <a:prstGeom prst="rect">
             <a:avLst/>
@@ -13151,7 +13143,7 @@
           <a:bodyPr/>
           <a:lstStyle/>
           <a:p>
-            <a:endParaRPr lang="en-GB"/>
+            <a:endParaRPr lang="en-GB" dirty="0"/>
           </a:p>
         </p:txBody>
       </p:sp>
@@ -13236,7 +13228,7 @@
           <a:lstStyle/>
           <a:p>
             <a:r>
-              <a:rPr sz="1200" b="1">
+              <a:rPr lang="en-US" sz="1200" b="1" dirty="0">
                 <a:solidFill>
                   <a:srgbClr val="18A7CC"/>
                 </a:solidFill>
@@ -13244,8 +13236,16 @@
                 <a:ea typeface="Trebuchet MS"/>
                 <a:cs typeface="Trebuchet MS"/>
               </a:rPr>
-              <a:t>Router</a:t>
-            </a:r>
+              <a:t>Modem</a:t>
+            </a:r>
+            <a:endParaRPr sz="1200" b="1" dirty="0">
+              <a:solidFill>
+                <a:srgbClr val="18A7CC"/>
+              </a:solidFill>
+              <a:latin typeface="Trebuchet MS"/>
+              <a:ea typeface="Trebuchet MS"/>
+              <a:cs typeface="Trebuchet MS"/>
+            </a:endParaRPr>
           </a:p>
         </p:txBody>
       </p:sp>
@@ -13265,8 +13265,8 @@
         </p:nvSpPr>
         <p:spPr>
           <a:xfrm>
-            <a:off x="781050" y="2171700"/>
-            <a:ext cx="3996549" cy="981075"/>
+            <a:off x="781050" y="2171701"/>
+            <a:ext cx="3996549" cy="592136"/>
           </a:xfrm>
           <a:prstGeom prst="rect">
             <a:avLst/>
@@ -13283,15 +13283,14 @@
           <a:lstStyle/>
           <a:p>
             <a:r>
-              <a:rPr sz="1200" b="0" dirty="0">
+              <a:rPr lang="en-GB" sz="1200" dirty="0">
                 <a:solidFill>
                   <a:srgbClr val="333333"/>
                 </a:solidFill>
-                <a:latin typeface="Trebuchet MS"/>
                 <a:ea typeface="Trebuchet MS"/>
                 <a:cs typeface="Trebuchet MS"/>
               </a:rPr>
-              <a:t>A router connects different networks and forwards data in the correct direction.</a:t>
+              <a:t>A modem converts the signal into the form required by the connection to the service provider.</a:t>
             </a:r>
           </a:p>
         </p:txBody>
@@ -13330,7 +13329,7 @@
           <a:lstStyle/>
           <a:p>
             <a:r>
-              <a:rPr sz="1200" b="1">
+              <a:rPr lang="en-US" sz="1200" b="1" dirty="0">
                 <a:solidFill>
                   <a:srgbClr val="18A7CC"/>
                 </a:solidFill>
@@ -13338,8 +13337,16 @@
                 <a:ea typeface="Trebuchet MS"/>
                 <a:cs typeface="Trebuchet MS"/>
               </a:rPr>
-              <a:t>Modem</a:t>
-            </a:r>
+              <a:t>Router</a:t>
+            </a:r>
+            <a:endParaRPr sz="1200" b="1" dirty="0">
+              <a:solidFill>
+                <a:srgbClr val="18A7CC"/>
+              </a:solidFill>
+              <a:latin typeface="Trebuchet MS"/>
+              <a:ea typeface="Trebuchet MS"/>
+              <a:cs typeface="Trebuchet MS"/>
+            </a:endParaRPr>
           </a:p>
         </p:txBody>
       </p:sp>
@@ -13360,7 +13367,7 @@
         <p:spPr>
           <a:xfrm>
             <a:off x="781050" y="3505200"/>
-            <a:ext cx="4016348" cy="981075"/>
+            <a:ext cx="4016348" cy="671779"/>
           </a:xfrm>
           <a:prstGeom prst="rect">
             <a:avLst/>
@@ -13377,16 +13384,25 @@
           <a:lstStyle/>
           <a:p>
             <a:r>
-              <a:rPr sz="1200" b="0" dirty="0">
+              <a:rPr lang="en-GB" sz="1200" b="1" dirty="0">
                 <a:solidFill>
                   <a:srgbClr val="333333"/>
                 </a:solidFill>
-                <a:latin typeface="Trebuchet MS"/>
                 <a:ea typeface="Trebuchet MS"/>
                 <a:cs typeface="Trebuchet MS"/>
               </a:rPr>
-              <a:t>A modem converts the signal into the form required by the connection to the service provider.</a:t>
-            </a:r>
+              <a:t>A router connects different networks and forwards data in the correct direction.</a:t>
+            </a:r>
+          </a:p>
+          <a:p>
+            <a:endParaRPr sz="1200" b="0" dirty="0">
+              <a:solidFill>
+                <a:srgbClr val="333333"/>
+              </a:solidFill>
+              <a:latin typeface="Trebuchet MS"/>
+              <a:ea typeface="Trebuchet MS"/>
+              <a:cs typeface="Trebuchet MS"/>
+            </a:endParaRPr>
           </a:p>
         </p:txBody>
       </p:sp>
@@ -13453,8 +13469,8 @@
         </p:nvSpPr>
         <p:spPr>
           <a:xfrm>
-            <a:off x="781050" y="4838700"/>
-            <a:ext cx="3957087" cy="981075"/>
+            <a:off x="781050" y="4838701"/>
+            <a:ext cx="3957087" cy="552450"/>
           </a:xfrm>
           <a:prstGeom prst="rect">
             <a:avLst/>
